--- a/Rodaje en tierra y CO2 — Presentación.pptx
+++ b/Rodaje en tierra y CO2 — Presentación.pptx
@@ -600,7 +600,7 @@
           <a:p>
             <a:r>
               <a:rPr lang="en-US" dirty="0"/>
-              <a:t>Tiempo: 45 segundos. La cuenta es combustible = minutos de rodaje por kilos por minuto, y CO2 = combustible por 3,16. En el escenario bajo son 10,3 millones de toneladas; si el consumo real fuera el doble, 20,6 millones, pero ese valor aún está por validar contra la base de motores OACI/EASA. Bajar el rodaje un 10 % evitaría cerca de 1,03 millones de toneladas. El ranking de aeropuertos no cambia con el supuesto, porque todos se multiplican por el mismo número. Límite honesto: no sabemos el motor de cada vuelo.</a:t>
+              <a:t>Tiempo: 45 segundos. La cuenta es combustible = minutos de rodaje por kilos por minuto, y CO2 = combustible por 3,16. En el escenario bajo son 10,3 millones de toneladas; si el consumo real fuera el doble, 20,6 millones, pero ese valor aún está por validar contra la base de motores OACI/EASA. Bajar el rodaje un 10 % evitaría cerca de 1,03 millones de toneladas. El ranking de aeropuertos no cambia con el supuesto, porque todos se multiplican por el mismo número. Límite honesto: no sabemos el motor de cada vuelo, así que son estimaciones de escenario, no combustible ni CO2 medidos. Si preguntan por la segunda intervención (bajar los aeropuertos lentos hasta la mediana de 15,7 min): evitaría unas 1.007.869 t; si se exigen ambos tiempos válidos, baja 690 t (0,07 %). Las dos intervenciones no se suman.</a:t>
             </a:r>
             <a:endParaRPr lang="en-US" dirty="0"/>
           </a:p>
@@ -864,7 +864,7 @@
           <a:p>
             <a:r>
               <a:rPr lang="en-US" dirty="0"/>
-              <a:t>Tiempo: 45 segundos. El volumen que exige el docente se cumple en la entrada: 9,47 GB de CSV, 36 archivos mensuales. Lo convertimos a Parquet, columnar y particionado por año y mes, que pesa 664 MB y conserva las 20.928.579 filas. Para el total excluimos 292.357 filas (1,4 %), casi todas por datos nulos; solo 54 salidas y 219 llegadas superan los 180 minutos.</a:t>
+              <a:t>Tiempo: 45 segundos. El volumen que exige el docente se cumple en la entrada: 9,47 GB de CSV, 36 archivos mensuales. Lo convertimos a Parquet, columnar y particionado por año y mes, que pesa 664 MB y conserva las 20.928.579 filas. Para el total excluimos 292.357 filas (1,4 %), casi todas por datos nulos; solo 54 salidas y 219 llegadas superan los 180 minutos. Si preguntan por los desviados: se conservan y su rodaje de llegada se atribuye al destino, porque el TaxiIn solo existe cuando el vuelo llegó a su destino; son 48.343 con ambos tiempos válidos, el 0,23 %.</a:t>
             </a:r>
             <a:endParaRPr lang="en-US" dirty="0"/>
           </a:p>
@@ -1040,7 +1040,7 @@
           <a:p>
             <a:r>
               <a:rPr lang="en-US" dirty="0"/>
-              <a:t>Tiempo: 75 segundos. Prefect: el flujo es idempotente. Si llega un mes nuevo, se agrega a la lista y se vuelve a correr: lo ya procesado se omite y el CO2 se recalcula sobre todo el Parquet. Mostramos también un fallo controlado. Dask: misma agregación con dos configuraciones de workers y memoria. Con este volumen ganó A, con menos procesos y más hilos, porque coordinar procesos pequeños cuesta más. En B un worker llegó cerca de su límite de 1 GB. Una tercera configuración (4 × 2 GB) no se corrió por falta de memoria libre en el equipo. [Insertar aquí captura del dashboard de Dask y del historial de Prefect si se quiere mostrar en vivo.] NOTA PARA EL GRUPO: los tiempos son los del archivo benchmark_dask.csv de la carpeta resultados; el informe de Word cita 5,1 s y 9,6 s de otra corrida. Unifiquen la cifra antes de presentar.</a:t>
+              <a:t>Tiempo: 75 segundos. Prefect: el flujo es idempotente. Si llega un mes nuevo, se agrega a la lista y se vuelve a correr: lo ya procesado se omite y el CO2 se recalcula sobre todo el Parquet. Mostramos también un fallo controlado. Dask: misma agregación con dos configuraciones de workers y memoria. Con este volumen ganó A, con menos procesos y más hilos, porque coordinar procesos pequeños cuesta más. En B un worker llegó cerca de su límite de 1 GB. Una tercera configuración (4 × 2 GB) no se corrió por falta de memoria libre en el equipo. [Insertar aquí captura del dashboard de Dask y del historial de Prefect si se quiere mostrar en vivo.] Los tiempos son los del archivo benchmark_dask.csv, los mismos que cita el informe.</a:t>
             </a:r>
             <a:endParaRPr lang="en-US" dirty="0"/>
           </a:p>
@@ -1128,7 +1128,7 @@
           <a:p>
             <a:r>
               <a:rPr lang="en-US" dirty="0"/>
-              <a:t>Tiempo: 45 segundos. IMPORTANTE ANTES DE PRESENTAR: este recuadro amarillo es un marcador. Reemplácenlo por la captura real del tablero cuando la base en AWS y Grafana estén listos. El script scripts/subir_resultados_aws.py carga las tablas; el tablero tiene un selector de escenario (bajo 6 kg/min, alto 12 kg/min por validar). Mensaje: el usuario de Sostenibilidad no ve SQL, ve cinco paneles que responden una pregunta cada uno.</a:t>
+              <a:t>Tiempo: 45 segundos. Aquí se muestra la captura del tablero de Grafana conectado a RDS. El KPI de 41,3 millones del tablero son tramos de rodaje válidos (salidas + llegadas), no vuelos únicos; el promedio de 13,17 min es por tramo. El script scripts/subir_resultados_aws.py carga las tablas; el tablero tiene un selector de escenario (bajo 6 kg/min, alto 12 kg/min por validar). Mensaje: el usuario de Sostenibilidad no ve SQL, ve cinco paneles que responden una pregunta cada uno.</a:t>
             </a:r>
             <a:endParaRPr lang="en-US" dirty="0"/>
           </a:p>
@@ -2443,7 +2443,7 @@
                 <a:ea typeface="Public Sans" pitchFamily="34" charset="-122"/>
                 <a:cs typeface="Public Sans" pitchFamily="34" charset="-120"/>
               </a:rPr>
-              <a:t>de toneladas de CO2 en tres años (9,06 millones de horas de rodaje), escenario bajo de 6 kg de combustible por minuto.</a:t>
+              <a:t>de toneladas de CO2 estimadas en tres años (9,06 millones de horas de rodaje), escenario bajo de 6 kg de combustible por minuto.</a:t>
             </a:r>
             <a:endParaRPr lang="en-US" sz="1800" dirty="0"/>
           </a:p>
@@ -4044,7 +4044,7 @@
                 <a:ea typeface="Public Sans" pitchFamily="34" charset="-122"/>
                 <a:cs typeface="Public Sans" pitchFamily="34" charset="-120"/>
               </a:rPr>
-              <a:t>Minutos de rodaje por vuelo: salida (TaxiOut) y llegada (TaxiIn).</a:t>
+              <a:t>Minutos de rodaje en tierra: salida (TaxiOut) y llegada (TaxiIn).</a:t>
             </a:r>
             <a:endParaRPr lang="en-US" sz="1500" dirty="0"/>
           </a:p>
@@ -7093,7 +7093,7 @@
                 <a:ea typeface="Public Sans" pitchFamily="34" charset="-122"/>
                 <a:cs typeface="Public Sans" pitchFamily="34" charset="-120"/>
               </a:rPr>
-              <a:t>A la base de datos suben solo tablas agregadas: cerca de </a:t>
+              <a:t>A la base de datos suben solo tablas agregadas: unas </a:t>
             </a:r>
             <a:r>
               <a:rPr lang="en-US" sz="1600" b="1" dirty="0">
@@ -7104,7 +7104,7 @@
                 <a:ea typeface="Public Sans" pitchFamily="34" charset="-122"/>
                 <a:cs typeface="Public Sans" pitchFamily="34" charset="-120"/>
               </a:rPr>
-              <a:t>17.000 filas</a:t>
+              <a:t>17.350 filas</a:t>
             </a:r>
             <a:r>
               <a:rPr lang="en-US" sz="1600" dirty="0">
@@ -7115,7 +7115,7 @@
                 <a:ea typeface="Public Sans" pitchFamily="34" charset="-122"/>
                 <a:cs typeface="Public Sans" pitchFamily="34" charset="-120"/>
               </a:rPr>
-              <a:t>, nunca los 9,47 GB.</a:t>
+              <a:t> en 7 tablas, nunca los 9,47 GB.</a:t>
             </a:r>
             <a:endParaRPr lang="en-US" sz="1600" dirty="0"/>
           </a:p>
